--- a/docs/proposals/softbank-ultraman-caravan/規模別お見積り3パターンと今期スポットテスト.pptx
+++ b/docs/proposals/softbank-ultraman-caravan/規模別お見積り3パターンと今期スポットテスト.pptx
@@ -3188,7 +3188,7 @@
                 <a:latin typeface="Meiryo"/>
                 <a:ea typeface="Meiryo"/>
               </a:rPr>
-              <a:t>7/17お打ち合わせを受け、貴社実績同等・現実的・半分の3規模でご提示します(単価は共通:IP使用料2,000万円/着ぐるみ20万円/ロイヤリティ20%)</a:t>
+              <a:t>7/17お打ち合わせを受け、全量・半分・3IP分割(約1/3)の3規模でご提示します(単価は共通:IP使用料2,000万円/着ぐるみ20万円/ロイヤリティ20%)</a:t>
             </a:r>
           </a:p>
         </p:txBody>
@@ -3517,7 +3517,7 @@
                           <a:latin typeface="Meiryo"/>
                           <a:ea typeface="Meiryo"/>
                         </a:rPr>
-                        <a:t>最大(貴社実績同等)</a:t>
+                        <a:t>最大(貴社実績同等・全量)</a:t>
                       </a:r>
                     </a:p>
                   </a:txBody>
@@ -3680,7 +3680,7 @@
                           <a:latin typeface="Meiryo"/>
                           <a:ea typeface="Meiryo"/>
                         </a:rPr>
-                        <a:t>現実的(実績の75%)</a:t>
+                        <a:t>半分(実績の50%)</a:t>
                       </a:r>
                     </a:p>
                   </a:txBody>
@@ -3703,7 +3703,7 @@
                           <a:latin typeface="Meiryo"/>
                           <a:ea typeface="Meiryo"/>
                         </a:rPr>
-                        <a:t>450開催</a:t>
+                        <a:t>300開催</a:t>
                       </a:r>
                     </a:p>
                   </a:txBody>
@@ -3726,7 +3726,7 @@
                           <a:latin typeface="Meiryo"/>
                           <a:ea typeface="Meiryo"/>
                         </a:rPr>
-                        <a:t>キット600式・ノベルティ3,000セット・ツール全店2回</a:t>
+                        <a:t>キット400式・ノベルティ2,000セット・ツール全店1回</a:t>
                       </a:r>
                     </a:p>
                   </a:txBody>
@@ -3772,7 +3772,7 @@
                           <a:latin typeface="Meiryo"/>
                           <a:ea typeface="Meiryo"/>
                         </a:rPr>
-                        <a:t>9,000万円</a:t>
+                        <a:t>6,000万円</a:t>
                       </a:r>
                     </a:p>
                   </a:txBody>
@@ -3795,7 +3795,7 @@
                           <a:latin typeface="Meiryo"/>
                           <a:ea typeface="Meiryo"/>
                         </a:rPr>
-                        <a:t>約2,750万円</a:t>
+                        <a:t>約1,790万円</a:t>
                       </a:r>
                     </a:p>
                   </a:txBody>
@@ -3818,7 +3818,7 @@
                           <a:latin typeface="Meiryo"/>
                           <a:ea typeface="Meiryo"/>
                         </a:rPr>
-                        <a:t>約1.38億円</a:t>
+                        <a:t>約9,800万円</a:t>
                       </a:r>
                     </a:p>
                   </a:txBody>
@@ -3843,7 +3843,7 @@
                           <a:latin typeface="Meiryo"/>
                           <a:ea typeface="Meiryo"/>
                         </a:rPr>
-                        <a:t>半分(実績の50%)</a:t>
+                        <a:t>3IP分割(約1/3配分)</a:t>
                       </a:r>
                     </a:p>
                   </a:txBody>
@@ -3866,7 +3866,7 @@
                           <a:latin typeface="Meiryo"/>
                           <a:ea typeface="Meiryo"/>
                         </a:rPr>
-                        <a:t>300開催</a:t>
+                        <a:t>200開催</a:t>
                       </a:r>
                     </a:p>
                   </a:txBody>
@@ -3889,7 +3889,7 @@
                           <a:latin typeface="Meiryo"/>
                           <a:ea typeface="Meiryo"/>
                         </a:rPr>
-                        <a:t>キット400式・ノベルティ2,000セット・ツール全店1回</a:t>
+                        <a:t>キット270式・ノベルティ1,300セット・ツール1/3</a:t>
                       </a:r>
                     </a:p>
                   </a:txBody>
@@ -3935,7 +3935,7 @@
                           <a:latin typeface="Meiryo"/>
                           <a:ea typeface="Meiryo"/>
                         </a:rPr>
-                        <a:t>6,000万円</a:t>
+                        <a:t>4,000万円</a:t>
                       </a:r>
                     </a:p>
                   </a:txBody>
@@ -3958,7 +3958,7 @@
                           <a:latin typeface="Meiryo"/>
                           <a:ea typeface="Meiryo"/>
                         </a:rPr>
-                        <a:t>約1,790万円</a:t>
+                        <a:t>約1,190万円</a:t>
                       </a:r>
                     </a:p>
                   </a:txBody>
@@ -3981,7 +3981,7 @@
                           <a:latin typeface="Meiryo"/>
                           <a:ea typeface="Meiryo"/>
                         </a:rPr>
-                        <a:t>約9,800万円</a:t>
+                        <a:t>約7,200万円</a:t>
                       </a:r>
                     </a:p>
                   </a:txBody>
@@ -4066,7 +4066,7 @@
           <a:p>
             <a:pPr algn="l">
               <a:spcAft>
-                <a:spcPts val="600"/>
+                <a:spcPts val="500"/>
               </a:spcAft>
             </a:pPr>
             <a:r>
@@ -4077,34 +4077,34 @@
                 <a:latin typeface="Meiryo"/>
                 <a:ea typeface="Meiryo"/>
               </a:rPr>
-              <a:t>お打ち合わせを受けた2つのご提案</a:t>
+              <a:t>お打ち合わせを受けたご提案</a:t>
             </a:r>
           </a:p>
           <a:p>
             <a:pPr algn="l">
               <a:spcAft>
-                <a:spcPts val="600"/>
+                <a:spcPts val="500"/>
               </a:spcAft>
             </a:pPr>
             <a:r>
-              <a:rPr sz="1250" b="0">
+              <a:rPr sz="1200" b="0">
                 <a:solidFill>
                   <a:srgbClr val="1A1A1A"/>
                 </a:solidFill>
                 <a:latin typeface="Meiryo"/>
                 <a:ea typeface="Meiryo"/>
               </a:rPr>
-              <a:t>・年間の最低開催数をお約束いただける場合、着ぐるみ単価を優遇します(例:400開催以上のコミットで17万円/開催)</a:t>
+              <a:t>・年間の最低開催数・最低作成数をお約束いただける場合、着ぐるみ単価を優遇します(例:400開催以上のコミットで17万円/開催)</a:t>
             </a:r>
           </a:p>
           <a:p>
             <a:pPr algn="l">
               <a:spcAft>
-                <a:spcPts val="600"/>
+                <a:spcPts val="500"/>
               </a:spcAft>
             </a:pPr>
             <a:r>
-              <a:rPr sz="1250" b="0">
+              <a:rPr sz="1200" b="0">
                 <a:solidFill>
                   <a:srgbClr val="1A1A1A"/>
                 </a:solidFill>
@@ -4112,6 +4112,23 @@
                 <a:ea typeface="Meiryo"/>
               </a:rPr>
               <a:t>・ウルトラマンは7・8月も稼働可能です(現行IP様は夏季稼働不可)。夏商戦を含むフル12か月稼働なら最大720開催まで拡張できます</a:t>
+            </a:r>
+          </a:p>
+          <a:p>
+            <a:pPr algn="l">
+              <a:spcAft>
+                <a:spcPts val="500"/>
+              </a:spcAft>
+            </a:pPr>
+            <a:r>
+              <a:rPr sz="1200" b="0">
+                <a:solidFill>
+                  <a:srgbClr val="1A1A1A"/>
+                </a:solidFill>
+                <a:latin typeface="Meiryo"/>
+                <a:ea typeface="Meiryo"/>
+              </a:rPr>
+              <a:t>・複数IPでのご運用でも、映画・新TVシリーズ・玩具新商品と連動した季節企画で「切替の変化」をご提供できます(キャラクター切替・選べるヒーロー等)</a:t>
             </a:r>
           </a:p>
         </p:txBody>
@@ -4948,7 +4965,7 @@
         <p:spPr>
           <a:xfrm>
             <a:off x="640080" y="5257800"/>
-            <a:ext cx="10881360" cy="1097280"/>
+            <a:ext cx="10881360" cy="1188720"/>
           </a:xfrm>
           <a:prstGeom prst="rect">
             <a:avLst/>
@@ -4963,7 +4980,34 @@
           <a:p>
             <a:pPr algn="l">
               <a:spcAft>
-                <a:spcPts val="500"/>
+                <a:spcPts val="400"/>
+              </a:spcAft>
+            </a:pPr>
+            <a:r>
+              <a:rPr sz="1250" b="1">
+                <a:solidFill>
+                  <a:srgbClr val="C00000"/>
+                </a:solidFill>
+                <a:latin typeface="Meiryo"/>
+                <a:ea typeface="Meiryo"/>
+              </a:rPr>
+              <a:t>継続パック(S1):</a:t>
+            </a:r>
+            <a:r>
+              <a:rPr sz="1250" b="0">
+                <a:solidFill>
+                  <a:srgbClr val="1A1A1A"/>
+                </a:solidFill>
+                <a:latin typeface="Meiryo"/>
+                <a:ea typeface="Meiryo"/>
+              </a:rPr>
+              <a:t>隔週(月2開催)190万円/月、毎週(月4開催)360万円/月(単発比の優遇設定)。スポットはIP使用料不要です。</a:t>
+            </a:r>
+          </a:p>
+          <a:p>
+            <a:pPr algn="l">
+              <a:spcAft>
+                <a:spcPts val="400"/>
               </a:spcAft>
             </a:pPr>
             <a:r>
@@ -4977,23 +5021,6 @@
               <a:t>実施条件:</a:t>
             </a:r>
             <a:r>
-              <a:rPr sz="1250" b="0">
-                <a:solidFill>
-                  <a:srgbClr val="1A1A1A"/>
-                </a:solidFill>
-                <a:latin typeface="Meiryo"/>
-                <a:ea typeface="Meiryo"/>
-              </a:rPr>
-              <a:t>当社の既存ライセンス条件の調整を経て、実施時期・会場を確定します(調整は当社にて速やかに進めます)。</a:t>
-            </a:r>
-          </a:p>
-          <a:p>
-            <a:pPr algn="l">
-              <a:spcAft>
-                <a:spcPts val="500"/>
-              </a:spcAft>
-            </a:pPr>
-            <a:r>
               <a:rPr sz="1200" b="0">
                 <a:solidFill>
                   <a:srgbClr val="1A1A1A"/>
@@ -5001,13 +5028,13 @@
                 <a:latin typeface="Meiryo"/>
                 <a:ea typeface="Meiryo"/>
               </a:rPr>
-              <a:t>測定項目:来場数・撮影参加組数・ブース送客数を実測し、年間お見積りの開催数・KPI精緻化に活用します。</a:t>
+              <a:t>当社の既存ライセンス条件の調整を経て、実施時期・会場を確定します(調整は当社にて速やかに進めます)。測定項目:来場数・撮影参加組数・ブース送客数。</a:t>
             </a:r>
           </a:p>
           <a:p>
             <a:pPr algn="l">
               <a:spcAft>
-                <a:spcPts val="500"/>
+                <a:spcPts val="400"/>
               </a:spcAft>
             </a:pPr>
             <a:r>
@@ -5018,7 +5045,7 @@
                 <a:latin typeface="Meiryo"/>
                 <a:ea typeface="Meiryo"/>
               </a:rPr>
-              <a:t>※通常イベントキットを用いるテストは、キット製作を伴うため来年度からのご提案とします。※本テスト費用は、年間ご契約成立時の扱い(充当等)を別途ご相談させてください。</a:t>
+              <a:t>※通常イベントキットを用いるテストはキット製作を伴うため来年度からのご提案。※本テスト費用は、年間ご契約成立時に翌年度IP使用料へ充当するご相談が可能です。</a:t>
             </a:r>
           </a:p>
         </p:txBody>

--- a/docs/proposals/softbank-ultraman-caravan/規模別お見積り3パターンと今期スポットテスト.pptx
+++ b/docs/proposals/softbank-ultraman-caravan/規模別お見積り3パターンと今期スポットテスト.pptx
@@ -3563,7 +3563,7 @@
                           <a:latin typeface="Meiryo"/>
                           <a:ea typeface="Meiryo"/>
                         </a:rPr>
-                        <a:t>キット800式・ノベルティ4,000セット・ツール全店2回</a:t>
+                        <a:t>キット800式・ノベルティ2.1万セット(実績)・ツール全店2回</a:t>
                       </a:r>
                     </a:p>
                   </a:txBody>
@@ -3632,7 +3632,7 @@
                           <a:latin typeface="Meiryo"/>
                           <a:ea typeface="Meiryo"/>
                         </a:rPr>
-                        <a:t>約3,570万円</a:t>
+                        <a:t>約6,480万円</a:t>
                       </a:r>
                     </a:p>
                   </a:txBody>
@@ -3655,7 +3655,7 @@
                           <a:latin typeface="Meiryo"/>
                           <a:ea typeface="Meiryo"/>
                         </a:rPr>
-                        <a:t>約1.76億円</a:t>
+                        <a:t>約2.05億円</a:t>
                       </a:r>
                     </a:p>
                   </a:txBody>
@@ -3726,7 +3726,7 @@
                           <a:latin typeface="Meiryo"/>
                           <a:ea typeface="Meiryo"/>
                         </a:rPr>
-                        <a:t>キット400式・ノベルティ2,000セット・ツール全店1回</a:t>
+                        <a:t>キット400式・ノベルティ1.05万セット・ツール全店1回</a:t>
                       </a:r>
                     </a:p>
                   </a:txBody>
@@ -3795,7 +3795,7 @@
                           <a:latin typeface="Meiryo"/>
                           <a:ea typeface="Meiryo"/>
                         </a:rPr>
-                        <a:t>約1,790万円</a:t>
+                        <a:t>約3,240万円</a:t>
                       </a:r>
                     </a:p>
                   </a:txBody>
@@ -3818,7 +3818,7 @@
                           <a:latin typeface="Meiryo"/>
                           <a:ea typeface="Meiryo"/>
                         </a:rPr>
-                        <a:t>約9,800万円</a:t>
+                        <a:t>約1.12億円</a:t>
                       </a:r>
                     </a:p>
                   </a:txBody>
@@ -3889,7 +3889,7 @@
                           <a:latin typeface="Meiryo"/>
                           <a:ea typeface="Meiryo"/>
                         </a:rPr>
-                        <a:t>キット270式・ノベルティ1,300セット・ツール1/3</a:t>
+                        <a:t>キット270式・ノベルティ7,000セット・ツール1/3</a:t>
                       </a:r>
                     </a:p>
                   </a:txBody>
@@ -3958,7 +3958,7 @@
                           <a:latin typeface="Meiryo"/>
                           <a:ea typeface="Meiryo"/>
                         </a:rPr>
-                        <a:t>約1,190万円</a:t>
+                        <a:t>約2,170万円</a:t>
                       </a:r>
                     </a:p>
                   </a:txBody>
@@ -3981,7 +3981,7 @@
                           <a:latin typeface="Meiryo"/>
                           <a:ea typeface="Meiryo"/>
                         </a:rPr>
-                        <a:t>約7,200万円</a:t>
+                        <a:t>約8,200万円</a:t>
                       </a:r>
                     </a:p>
                   </a:txBody>
@@ -4168,7 +4168,7 @@
                 <a:latin typeface="Meiryo"/>
                 <a:ea typeface="Meiryo"/>
               </a:rPr>
-              <a:t>※③はキット単価15.5万円/式・ノベルティ9,900円/セットの現行水準で試算。作成単価は数量により変動するため、ロイヤリティは作成実績(実額)ベースで精算します。</a:t>
+              <a:t>※③はキット単価15.5万円/式、ノベルティは貴社FY25ご実績(年約2.1万セット・作成費約1億8,500万円)を配分比で試算。ロイヤリティは作成実績(実額)ベースで精算します。</a:t>
             </a:r>
           </a:p>
           <a:p>
@@ -4185,7 +4185,7 @@
                 <a:latin typeface="Meiryo"/>
                 <a:ea typeface="Meiryo"/>
               </a:rPr>
-              <a:t>※ノベルティ・訴求ツールの年間実績数(貴社ご共有予定)を受領後、③を精緻化します。※固定費は①のみ。②③は実施・作成分だけの従量です。</a:t>
+              <a:t>※店頭訴求ツールの年間作成数(貴社ご確認中)の受領後、③をさらに精緻化します。※固定費は①のみ。②③は実施・作成分だけの従量です。</a:t>
             </a:r>
           </a:p>
         </p:txBody>

--- a/docs/proposals/softbank-ultraman-caravan/規模別お見積り3パターンと今期スポットテスト.pptx
+++ b/docs/proposals/softbank-ultraman-caravan/規模別お見積り3パターンと今期スポットテスト.pptx
@@ -4824,7 +4824,30 @@
                           <a:latin typeface="Meiryo"/>
                           <a:ea typeface="Meiryo"/>
                         </a:rPr>
-                        <a:t>推奨回数</a:t>
+                        <a:t>想定規模</a:t>
+                      </a:r>
+                    </a:p>
+                  </a:txBody>
+                  <a:tcPr anchor="ctr" marL="73152" marR="73152">
+                    <a:solidFill>
+                      <a:srgbClr val="FFFFFF"/>
+                    </a:solidFill>
+                  </a:tcPr>
+                </a:tc>
+                <a:tc>
+                  <a:txBody>
+                    <a:bodyPr/>
+                    <a:lstStyle/>
+                    <a:p>
+                      <a:r>
+                        <a:rPr sz="1100" b="1">
+                          <a:solidFill>
+                            <a:srgbClr val="1A1A1A"/>
+                          </a:solidFill>
+                          <a:latin typeface="Meiryo"/>
+                          <a:ea typeface="Meiryo"/>
+                        </a:rPr>
+                        <a:t>5施設程度(各1開催)を想定 → 総額500万円</a:t>
                       </a:r>
                     </a:p>
                   </a:txBody>
@@ -4847,30 +4870,7 @@
                           <a:latin typeface="Meiryo"/>
                           <a:ea typeface="Meiryo"/>
                         </a:rPr>
-                        <a:t>2〜3開催</a:t>
-                      </a:r>
-                    </a:p>
-                  </a:txBody>
-                  <a:tcPr anchor="ctr" marL="73152" marR="73152">
-                    <a:solidFill>
-                      <a:srgbClr val="FFFFFF"/>
-                    </a:solidFill>
-                  </a:tcPr>
-                </a:tc>
-                <a:tc>
-                  <a:txBody>
-                    <a:bodyPr/>
-                    <a:lstStyle/>
-                    <a:p>
-                      <a:r>
-                        <a:rPr sz="1100" b="0">
-                          <a:solidFill>
-                            <a:srgbClr val="1A1A1A"/>
-                          </a:solidFill>
-                          <a:latin typeface="Meiryo"/>
-                          <a:ea typeface="Meiryo"/>
-                        </a:rPr>
-                        <a:t>1〜2開催</a:t>
+                        <a:t>うち1〜2施設でのオプション実施</a:t>
                       </a:r>
                     </a:p>
                   </a:txBody>
@@ -4980,7 +4980,34 @@
           <a:p>
             <a:pPr algn="l">
               <a:spcAft>
-                <a:spcPts val="400"/>
+                <a:spcPts val="300"/>
+              </a:spcAft>
+            </a:pPr>
+            <a:r>
+              <a:rPr sz="1250" b="1">
+                <a:solidFill>
+                  <a:srgbClr val="C00000"/>
+                </a:solidFill>
+                <a:latin typeface="Meiryo"/>
+                <a:ea typeface="Meiryo"/>
+              </a:rPr>
+              <a:t>想定プラン:</a:t>
+            </a:r>
+            <a:r>
+              <a:rPr sz="1250" b="0">
+                <a:solidFill>
+                  <a:srgbClr val="1A1A1A"/>
+                </a:solidFill>
+                <a:latin typeface="Meiryo"/>
+                <a:ea typeface="Meiryo"/>
+              </a:rPr>
+              <a:t>エリア・施設タイプの異なる5施設で実施し、集客・送客効果を比較検証(S1×5施設=総額500万円・IP使用料不要)。</a:t>
+            </a:r>
+          </a:p>
+          <a:p>
+            <a:pPr algn="l">
+              <a:spcAft>
+                <a:spcPts val="300"/>
               </a:spcAft>
             </a:pPr>
             <a:r>
@@ -5001,13 +5028,13 @@
                 <a:latin typeface="Meiryo"/>
                 <a:ea typeface="Meiryo"/>
               </a:rPr>
-              <a:t>隔週(月2開催)190万円/月、毎週(月4開催)360万円/月(単発比の優遇設定)。スポットはIP使用料不要です。</a:t>
+              <a:t>隔週(月2開催)190万円/月、毎週(月4開催)360万円/月(単発比の優遇設定)。</a:t>
             </a:r>
           </a:p>
           <a:p>
             <a:pPr algn="l">
               <a:spcAft>
-                <a:spcPts val="400"/>
+                <a:spcPts val="300"/>
               </a:spcAft>
             </a:pPr>
             <a:r>
@@ -5034,7 +5061,7 @@
           <a:p>
             <a:pPr algn="l">
               <a:spcAft>
-                <a:spcPts val="400"/>
+                <a:spcPts val="300"/>
               </a:spcAft>
             </a:pPr>
             <a:r>

--- a/docs/proposals/softbank-ultraman-caravan/規模別お見積り3パターンと今期スポットテスト.pptx
+++ b/docs/proposals/softbank-ultraman-caravan/規模別お見積り3パターンと今期スポットテスト.pptx
@@ -4185,7 +4185,7 @@
                 <a:latin typeface="Meiryo"/>
                 <a:ea typeface="Meiryo"/>
               </a:rPr>
-              <a:t>※店頭訴求ツールの年間作成数(貴社ご確認中)の受領後、③をさらに精緻化します。※固定費は①のみ。②③は実施・作成分だけの従量です。</a:t>
+              <a:t>※店頭訴求ツールは作成数実績(ポスター・POP・チラシ等 年間約23.5万部)をご共有いただきました。作成費(金額)のご共有後、③を最終精緻化します。※固定費は①のみ。②③は実施・作成分だけの従量です。</a:t>
             </a:r>
           </a:p>
         </p:txBody>

--- a/docs/proposals/softbank-ultraman-caravan/規模別お見積り3パターンと今期スポットテスト.pptx
+++ b/docs/proposals/softbank-ultraman-caravan/規模別お見積り3パターンと今期スポットテスト.pptx
@@ -4185,7 +4185,24 @@
                 <a:latin typeface="Meiryo"/>
                 <a:ea typeface="Meiryo"/>
               </a:rPr>
-              <a:t>※店頭訴求ツールは作成数実績(ポスター・POP・チラシ等 年間約23.5万部)をご共有いただきました。作成費(金額)のご共有後、③を最終精緻化します。※固定費は①のみ。②③は実施・作成分だけの従量です。</a:t>
+              <a:t>※店頭訴求ツールは作成数実績(年間約23.5万部)をご共有いただきました。作成費(金額)のご共有後、③を最終精緻化します。※固定費は①のみ。②③は実施・作成分だけの従量です。</a:t>
+            </a:r>
+          </a:p>
+          <a:p>
+            <a:pPr algn="l">
+              <a:spcAft>
+                <a:spcPts val="300"/>
+              </a:spcAft>
+            </a:pPr>
+            <a:r>
+              <a:rPr sz="1000" b="0">
+                <a:solidFill>
+                  <a:srgbClr val="5A626B"/>
+                </a:solidFill>
+                <a:latin typeface="Meiryo"/>
+                <a:ea typeface="Meiryo"/>
+              </a:rPr>
+              <a:t>※②は土日2日間・ディレクター+アクター2名体制。首都圏内は交通実費込みの特別条件、首都圏外は交通・宿泊実費を別途申し受けます。</a:t>
             </a:r>
           </a:p>
         </p:txBody>
